--- a/submission/속도는벡터_중간발표_20260417_0000.pptx
+++ b/submission/속도는벡터_중간발표_20260417_0000.pptx
@@ -11624,8 +11624,8 @@
         </p:nvSpPr>
         <p:spPr>
           <a:xfrm>
-            <a:off x="640080" y="1280160"/>
-            <a:ext cx="10972800" cy="5303520"/>
+            <a:off x="457200" y="1280160"/>
+            <a:ext cx="6400800" cy="5303520"/>
           </a:xfrm>
           <a:prstGeom prst="rect">
             <a:avLst/>
@@ -11712,7 +11712,7 @@
               </a:spcAft>
             </a:pPr>
             <a:r>
-              <a:rPr sz="1400" b="0">
+              <a:rPr sz="1300" b="0">
                 <a:solidFill>
                   <a:srgbClr val="151515"/>
                 </a:solidFill>
@@ -11797,7 +11797,7 @@
               </a:spcAft>
             </a:pPr>
             <a:r>
-              <a:rPr sz="1400" b="0">
+              <a:rPr sz="1300" b="0">
                 <a:solidFill>
                   <a:srgbClr val="151515"/>
                 </a:solidFill>
@@ -11870,6 +11870,30 @@
           </a:p>
         </p:txBody>
       </p:sp>
+      <p:pic>
+        <p:nvPicPr>
+          <p:cNvPr id="4" name="Picture 3" descr="slide6_vector_c_snippet.png"/>
+          <p:cNvPicPr>
+            <a:picLocks noChangeAspect="1"/>
+          </p:cNvPicPr>
+          <p:nvPr/>
+        </p:nvPicPr>
+        <p:blipFill>
+          <a:blip r:embed="rId2"/>
+          <a:stretch>
+            <a:fillRect/>
+          </a:stretch>
+        </p:blipFill>
+        <p:spPr>
+          <a:xfrm>
+            <a:off x="7040880" y="1371600"/>
+            <a:ext cx="5029200" cy="1979917"/>
+          </a:xfrm>
+          <a:prstGeom prst="rect">
+            <a:avLst/>
+          </a:prstGeom>
+        </p:spPr>
+      </p:pic>
     </p:spTree>
   </p:cSld>
   <p:clrMapOvr>
@@ -13534,7 +13558,7 @@
         <p:spPr>
           <a:xfrm>
             <a:off x="6858000" y="1280160"/>
-            <a:ext cx="5029200" cy="3411190"/>
+            <a:ext cx="5029200" cy="1362829"/>
           </a:xfrm>
           <a:prstGeom prst="rect">
             <a:avLst/>
